--- a/Presentation2.pptx
+++ b/Presentation2.pptx
@@ -124,6 +124,9 @@
           <p14:sldIdLst/>
         </p14:section>
       </p14:sectionLst>
+    </p:ext>
+    <p:ext uri="{EFAFB233-063F-42B5-8137-9DF3F51BA10A}">
+      <p15:sldGuideLst xmlns:p15="http://schemas.microsoft.com/office/powerpoint/2012/main"/>
     </p:ext>
   </p:extLst>
 </p:presentation>
@@ -4935,6 +4938,59 @@
           </a:p>
         </p:txBody>
       </p:sp>
+      <p:sp>
+        <p:nvSpPr>
+          <p:cNvPr id="3" name="TextBox 2"/>
+          <p:cNvSpPr txBox="1"/>
+          <p:nvPr/>
+        </p:nvSpPr>
+        <p:spPr>
+          <a:xfrm>
+            <a:off x="0" y="124691"/>
+            <a:ext cx="11817928" cy="584775"/>
+          </a:xfrm>
+          <a:prstGeom prst="rect">
+            <a:avLst/>
+          </a:prstGeom>
+          <a:noFill/>
+        </p:spPr>
+        <p:txBody>
+          <a:bodyPr wrap="square" rtlCol="0">
+            <a:spAutoFit/>
+          </a:bodyPr>
+          <a:lstStyle/>
+          <a:p>
+            <a:pPr algn="ctr"/>
+            <a:r>
+              <a:rPr lang="vi-VN" sz="3200" smtClean="0">
+                <a:solidFill>
+                  <a:srgbClr val="FF0000"/>
+                </a:solidFill>
+                <a:effectLst>
+                  <a:outerShdw blurRad="38100" dist="38100" dir="2700000" algn="tl">
+                    <a:srgbClr val="000000">
+                      <a:alpha val="43137"/>
+                    </a:srgbClr>
+                  </a:outerShdw>
+                </a:effectLst>
+              </a:rPr>
+              <a:t>ĐÁNH GIÁ MỨC ĐỘ HOÀN THIỆN CỦA SẢN PHẨM </a:t>
+            </a:r>
+            <a:endParaRPr lang="vi-VN" sz="3200" dirty="0">
+              <a:solidFill>
+                <a:srgbClr val="FF0000"/>
+              </a:solidFill>
+              <a:effectLst>
+                <a:outerShdw blurRad="38100" dist="38100" dir="2700000" algn="tl">
+                  <a:srgbClr val="000000">
+                    <a:alpha val="43137"/>
+                  </a:srgbClr>
+                </a:outerShdw>
+              </a:effectLst>
+            </a:endParaRPr>
+          </a:p>
+        </p:txBody>
+      </p:sp>
     </p:spTree>
     <p:extLst>
       <p:ext uri="{BB962C8B-B14F-4D97-AF65-F5344CB8AC3E}">
